--- a/A2A协议2.0_AI智能体演进路线图_2026_V17_带水印.pptx
+++ b/A2A协议2.0_AI智能体演进路线图_2026_V17_带水印.pptx
@@ -3885,7 +3885,7 @@
                           </a:solidFill>
                           <a:latin typeface="Microsoft YaHei"/>
                         </a:rPr>
-                        <a:t>LangChain v0.1.x + RAG 2.0 + LlamaIndex</a:t>
+                        <a:t>LangChain v0.1.x + RAG v2.0.0 + LlamaIndex</a:t>
                       </a:r>
                     </a:p>
                   </a:txBody>
@@ -3981,7 +3981,7 @@
                           </a:solidFill>
                           <a:latin typeface="Microsoft YaHei"/>
                         </a:rPr>
-                        <a:t>【突破】完成RAG 2.0升级；【事件】多模态API发布；【未达成】长上下文理解未达预期；【展望】Q2实现智能问答落地</a:t>
+                        <a:t>【突破】完成RAG v2.0.0升级；【事件】多模态API发布；【未达成】长上下文理解未达预期；【展望】Q2实现智能问答落地</a:t>
                       </a:r>
                     </a:p>
                   </a:txBody>
@@ -4151,7 +4151,7 @@
                           </a:solidFill>
                           <a:latin typeface="Microsoft YaHei"/>
                         </a:rPr>
-                        <a:t>LangChain v0.1.x + RAG 2.0 + LlamaIndex</a:t>
+                        <a:t>LangChain v0.1.x + RAG v2.0.0 + LlamaIndex</a:t>
                       </a:r>
                     </a:p>
                   </a:txBody>

--- a/A2A协议2.0_AI智能体演进路线图_2026_V17_带水印.pptx
+++ b/A2A协议2.0_AI智能体演进路线图_2026_V17_带水印.pptx
@@ -3885,7 +3885,7 @@
                           </a:solidFill>
                           <a:latin typeface="Microsoft YaHei"/>
                         </a:rPr>
-                        <a:t>LangChain v0.1.x + RAG v2.0.0 + LlamaIndex</a:t>
+                        <a:t>LangChain v0.1.x + RAG v3.0.0 + LlamaIndex</a:t>
                       </a:r>
                     </a:p>
                   </a:txBody>
@@ -3981,7 +3981,7 @@
                           </a:solidFill>
                           <a:latin typeface="Microsoft YaHei"/>
                         </a:rPr>
-                        <a:t>【突破】完成RAG v2.0.0升级；【事件】多模态API发布；【未达成】长上下文理解未达预期；【展望】Q2实现智能问答落地</a:t>
+                        <a:t>【突破】完成RAG v3.0.0升级；【事件】多模态API发布；【未达成】长上下文理解未达预期；【展望】Q2实现智能问答落地</a:t>
                       </a:r>
                     </a:p>
                   </a:txBody>
@@ -4151,7 +4151,7 @@
                           </a:solidFill>
                           <a:latin typeface="Microsoft YaHei"/>
                         </a:rPr>
-                        <a:t>LangChain v0.1.x + RAG v2.0.0 + LlamaIndex</a:t>
+                        <a:t>LangChain v0.1.x + RAG v3.0.0 + LlamaIndex</a:t>
                       </a:r>
                     </a:p>
                   </a:txBody>
